--- a/docs/presentaciones/classes/clase-069-regresion-lineal-ecuacion-normal-vs-gradient-descent-presentacion.pptx
+++ b/docs/presentaciones/classes/clase-069-regresion-lineal-ecuacion-normal-vs-gradient-descent-presentacion.pptx
@@ -4933,7 +4933,7 @@
                 </a:solidFill>
                 <a:latin typeface="Segoe UI"/>
               </a:rPr>
-              <a:t>Primer bloque ejecutable del notebook.</a:t>
+              <a:t>Generamos $y = 4 + 3x + \text{ruido}\ \mathcal{N}(0,1)$ con $m=100$. El $\theta$ verdadero es $[4, 3]$, así que podremos verificar cuánto lo recupera cada método. Agregamos la columna de unos $x_0=1$ para absorber el bias.</a:t>
             </a:r>
           </a:p>
         </p:txBody>
@@ -5020,7 +5020,178 @@
                 </a:solidFill>
                 <a:latin typeface="Courier New"/>
               </a:rPr>
-              <a:t># Imports y configuración inicial</a:t>
+              <a:t>import numpy as np</a:t>
+            </a:r>
+          </a:p>
+          <a:p>
+            <a:pPr>
+              <a:defRPr sz="1200" b="0">
+                <a:solidFill>
+                  <a:srgbClr val="F8FAFC"/>
+                </a:solidFill>
+                <a:latin typeface="Courier New"/>
+              </a:defRPr>
+            </a:pPr>
+            <a:r>
+              <a:rPr sz="1200" b="0">
+                <a:solidFill>
+                  <a:srgbClr val="F8FAFC"/>
+                </a:solidFill>
+                <a:latin typeface="Courier New"/>
+              </a:rPr>
+              <a:t>import matplotlib.pyplot as plt</a:t>
+            </a:r>
+          </a:p>
+          <a:p>
+            <a:pPr>
+              <a:defRPr sz="1200" b="0">
+                <a:solidFill>
+                  <a:srgbClr val="F8FAFC"/>
+                </a:solidFill>
+                <a:latin typeface="Courier New"/>
+              </a:defRPr>
+            </a:pPr>
+            <a:r>
+              <a:rPr sz="1200" b="0">
+                <a:solidFill>
+                  <a:srgbClr val="F8FAFC"/>
+                </a:solidFill>
+                <a:latin typeface="Courier New"/>
+              </a:rPr>
+              <a:t> </a:t>
+            </a:r>
+          </a:p>
+          <a:p>
+            <a:pPr>
+              <a:defRPr sz="1200" b="0">
+                <a:solidFill>
+                  <a:srgbClr val="F8FAFC"/>
+                </a:solidFill>
+                <a:latin typeface="Courier New"/>
+              </a:defRPr>
+            </a:pPr>
+            <a:r>
+              <a:rPr sz="1200" b="0">
+                <a:solidFill>
+                  <a:srgbClr val="F8FAFC"/>
+                </a:solidFill>
+                <a:latin typeface="Courier New"/>
+              </a:rPr>
+              <a:t>np.random.seed(42)</a:t>
+            </a:r>
+          </a:p>
+          <a:p>
+            <a:pPr>
+              <a:defRPr sz="1200" b="0">
+                <a:solidFill>
+                  <a:srgbClr val="F8FAFC"/>
+                </a:solidFill>
+                <a:latin typeface="Courier New"/>
+              </a:defRPr>
+            </a:pPr>
+            <a:r>
+              <a:rPr sz="1200" b="0">
+                <a:solidFill>
+                  <a:srgbClr val="F8FAFC"/>
+                </a:solidFill>
+                <a:latin typeface="Courier New"/>
+              </a:rPr>
+              <a:t>m = 100</a:t>
+            </a:r>
+          </a:p>
+          <a:p>
+            <a:pPr>
+              <a:defRPr sz="1200" b="0">
+                <a:solidFill>
+                  <a:srgbClr val="F8FAFC"/>
+                </a:solidFill>
+                <a:latin typeface="Courier New"/>
+              </a:defRPr>
+            </a:pPr>
+            <a:r>
+              <a:rPr sz="1200" b="0">
+                <a:solidFill>
+                  <a:srgbClr val="F8FAFC"/>
+                </a:solidFill>
+                <a:latin typeface="Courier New"/>
+              </a:rPr>
+              <a:t>X = 2 * np.random.rand(m, 1)</a:t>
+            </a:r>
+          </a:p>
+          <a:p>
+            <a:pPr>
+              <a:defRPr sz="1200" b="0">
+                <a:solidFill>
+                  <a:srgbClr val="F8FAFC"/>
+                </a:solidFill>
+                <a:latin typeface="Courier New"/>
+              </a:defRPr>
+            </a:pPr>
+            <a:r>
+              <a:rPr sz="1200" b="0">
+                <a:solidFill>
+                  <a:srgbClr val="F8FAFC"/>
+                </a:solidFill>
+                <a:latin typeface="Courier New"/>
+              </a:rPr>
+              <a:t>y = 4 + 3 * X[:, 0] + np.random.randn(m)     # DGP: y = 4 + 3x + N(0,1)</a:t>
+            </a:r>
+          </a:p>
+          <a:p>
+            <a:pPr>
+              <a:defRPr sz="1200" b="0">
+                <a:solidFill>
+                  <a:srgbClr val="F8FAFC"/>
+                </a:solidFill>
+                <a:latin typeface="Courier New"/>
+              </a:defRPr>
+            </a:pPr>
+            <a:r>
+              <a:rPr sz="1200" b="0">
+                <a:solidFill>
+                  <a:srgbClr val="F8FAFC"/>
+                </a:solidFill>
+                <a:latin typeface="Courier New"/>
+              </a:rPr>
+              <a:t>X_b = np.c_[np.ones((m, 1)), X]              # columna de unos para el bias</a:t>
+            </a:r>
+          </a:p>
+          <a:p>
+            <a:pPr>
+              <a:defRPr sz="1200" b="0">
+                <a:solidFill>
+                  <a:srgbClr val="F8FAFC"/>
+                </a:solidFill>
+                <a:latin typeface="Courier New"/>
+              </a:defRPr>
+            </a:pPr>
+            <a:r>
+              <a:rPr sz="1200" b="0">
+                <a:solidFill>
+                  <a:srgbClr val="F8FAFC"/>
+                </a:solidFill>
+                <a:latin typeface="Courier New"/>
+              </a:rPr>
+              <a:t>print('X_b shape:', X_b.shape, '| y shape:', y.shape)</a:t>
+            </a:r>
+          </a:p>
+          <a:p>
+            <a:pPr>
+              <a:defRPr sz="1200" b="0">
+                <a:solidFill>
+                  <a:srgbClr val="F8FAFC"/>
+                </a:solidFill>
+                <a:latin typeface="Courier New"/>
+              </a:defRPr>
+            </a:pPr>
+            <a:r>
+              <a:rPr sz="1200" b="0">
+                <a:solidFill>
+                  <a:srgbClr val="F8FAFC"/>
+                </a:solidFill>
+                <a:latin typeface="Courier New"/>
+              </a:rPr>
+              <a:t>print('theta verdadero:', [4, 3])</a:t>
             </a:r>
           </a:p>
         </p:txBody>

--- a/docs/presentaciones/classes/clase-069-regresion-lineal-ecuacion-normal-vs-gradient-descent-presentacion.pptx
+++ b/docs/presentaciones/classes/clase-069-regresion-lineal-ecuacion-normal-vs-gradient-descent-presentacion.pptx
@@ -3272,7 +3272,7 @@
                 </a:solidFill>
                 <a:latin typeface="Segoe UI"/>
               </a:rPr>
-              <a:t>Parte: 1 — Machine Learning Clásico · Fuente: Géron, cap. 4 § Linear Regression.  Duración estimada: 60 min.</a:t>
+              <a:t>Parte: 1 — Machine Learning Clásico · Fuente: Géron, cap. 4 § Linear Regression.  Duración estimada: 60 min. · Nivel: Intermedio</a:t>
             </a:r>
           </a:p>
         </p:txBody>
@@ -3581,7 +3581,7 @@
                 </a:solidFill>
                 <a:latin typeface="Segoe UI"/>
               </a:rPr>
-              <a:t>Parte: 1 — Machine Learning Clásico · Fuente: Géron, cap. 4 § Linear Regression.  Duración estimada: 60 min.</a:t>
+              <a:t>Parte: 1 — Machine Learning Clásico · Fuente: Géron, cap. 4 § Linear Regression.  Duración estimada: 60 min. · Nivel: Intermedio</a:t>
             </a:r>
           </a:p>
         </p:txBody>
